--- a/FIFA Rankings Presentation.pptx
+++ b/FIFA Rankings Presentation.pptx
@@ -1495,6 +1495,18 @@
   <p:clrMapOvr>
     <a:masterClrMapping/>
   </p:clrMapOvr>
+  <mc:AlternateContent xmlns:mc="http://schemas.openxmlformats.org/markup-compatibility/2006">
+    <mc:Choice xmlns:p14="http://schemas.microsoft.com/office/powerpoint/2010/main" Requires="p14">
+      <p:transition spd="med" p14:dur="700">
+        <p:fade/>
+      </p:transition>
+    </mc:Choice>
+    <mc:Fallback>
+      <p:transition spd="med">
+        <p:fade/>
+      </p:transition>
+    </mc:Fallback>
+  </mc:AlternateContent>
 </p:sldLayout>
 </file>
 
@@ -1526,6 +1538,18 @@
   <p:sldLayoutIdLst>
     <p:sldLayoutId id="2147483649" r:id="rId1"/>
   </p:sldLayoutIdLst>
+  <mc:AlternateContent xmlns:mc="http://schemas.openxmlformats.org/markup-compatibility/2006">
+    <mc:Choice xmlns:p14="http://schemas.microsoft.com/office/powerpoint/2010/main" Requires="p14">
+      <p:transition spd="med" p14:dur="700">
+        <p:fade/>
+      </p:transition>
+    </mc:Choice>
+    <mc:Fallback>
+      <p:transition spd="med">
+        <p:fade/>
+      </p:transition>
+    </mc:Fallback>
+  </mc:AlternateContent>
   <p:hf sldNum="0" hdr="0" ftr="0" dt="0"/>
   <p:txStyles>
     <p:titleStyle>
@@ -2455,6 +2479,18 @@
   <p:clrMapOvr>
     <a:masterClrMapping/>
   </p:clrMapOvr>
+  <mc:AlternateContent xmlns:mc="http://schemas.openxmlformats.org/markup-compatibility/2006">
+    <mc:Choice xmlns:p14="http://schemas.microsoft.com/office/powerpoint/2010/main" Requires="p14">
+      <p:transition spd="med" p14:dur="700">
+        <p:fade/>
+      </p:transition>
+    </mc:Choice>
+    <mc:Fallback>
+      <p:transition spd="med">
+        <p:fade/>
+      </p:transition>
+    </mc:Fallback>
+  </mc:AlternateContent>
 </p:sld>
 </file>
 
@@ -2914,6 +2950,18 @@
   <p:clrMapOvr>
     <a:masterClrMapping/>
   </p:clrMapOvr>
+  <mc:AlternateContent xmlns:mc="http://schemas.openxmlformats.org/markup-compatibility/2006">
+    <mc:Choice xmlns:p14="http://schemas.microsoft.com/office/powerpoint/2010/main" Requires="p14">
+      <p:transition spd="med" p14:dur="700">
+        <p:fade/>
+      </p:transition>
+    </mc:Choice>
+    <mc:Fallback>
+      <p:transition spd="med">
+        <p:fade/>
+      </p:transition>
+    </mc:Fallback>
+  </mc:AlternateContent>
 </p:sld>
 </file>
 
@@ -3170,7 +3218,7 @@
                 <a:ea typeface="Calibri" pitchFamily="34" charset="-122"/>
                 <a:cs typeface="Calibri" pitchFamily="34" charset="-120"/>
               </a:rPr>
-              <a:t>The AFC and CAF columns are positive against almost every opponent, both confederations beat their FIFA ranking expectations by 10 to 24pp. UEFA and CONMEBOL are rated within a few points of each other. And the matches between OFC and other confederations are mostly noise, there weren’t a lot of matches played so the results are a bit misleading.</a:t>
+              <a:t>The AFC and CAF rows are positive against almost every opponent, both confederations beat their FIFA ranking expectations by 10 to 24pp. UEFA and CONMEBOL are rated within a few points of each other. And the matches between OFC and other confederations are mostly noise, there weren’t a lot of matches played so the results are a bit misleading.</a:t>
             </a:r>
             <a:endParaRPr lang="en-US" sz="1300" dirty="0"/>
           </a:p>
@@ -3367,6 +3415,18 @@
   <p:clrMapOvr>
     <a:masterClrMapping/>
   </p:clrMapOvr>
+  <mc:AlternateContent xmlns:mc="http://schemas.openxmlformats.org/markup-compatibility/2006">
+    <mc:Choice xmlns:p14="http://schemas.microsoft.com/office/powerpoint/2010/main" Requires="p14">
+      <p:transition spd="med" p14:dur="700">
+        <p:fade/>
+      </p:transition>
+    </mc:Choice>
+    <mc:Fallback>
+      <p:transition spd="med">
+        <p:fade/>
+      </p:transition>
+    </mc:Fallback>
+  </mc:AlternateContent>
 </p:sld>
 </file>
 
@@ -3820,6 +3880,18 @@
   <p:clrMapOvr>
     <a:masterClrMapping/>
   </p:clrMapOvr>
+  <mc:AlternateContent xmlns:mc="http://schemas.openxmlformats.org/markup-compatibility/2006">
+    <mc:Choice xmlns:p14="http://schemas.microsoft.com/office/powerpoint/2010/main" Requires="p14">
+      <p:transition spd="med" p14:dur="700">
+        <p:fade/>
+      </p:transition>
+    </mc:Choice>
+    <mc:Fallback>
+      <p:transition spd="med">
+        <p:fade/>
+      </p:transition>
+    </mc:Fallback>
+  </mc:AlternateContent>
 </p:sld>
 </file>
 
@@ -4601,6 +4673,18 @@
   <p:clrMapOvr>
     <a:masterClrMapping/>
   </p:clrMapOvr>
+  <mc:AlternateContent xmlns:mc="http://schemas.openxmlformats.org/markup-compatibility/2006">
+    <mc:Choice xmlns:p14="http://schemas.microsoft.com/office/powerpoint/2010/main" Requires="p14">
+      <p:transition spd="med" p14:dur="700">
+        <p:fade/>
+      </p:transition>
+    </mc:Choice>
+    <mc:Fallback>
+      <p:transition spd="med">
+        <p:fade/>
+      </p:transition>
+    </mc:Fallback>
+  </mc:AlternateContent>
 </p:sld>
 </file>
 
@@ -5283,6 +5367,18 @@
   <p:clrMapOvr>
     <a:masterClrMapping/>
   </p:clrMapOvr>
+  <mc:AlternateContent xmlns:mc="http://schemas.openxmlformats.org/markup-compatibility/2006">
+    <mc:Choice xmlns:p14="http://schemas.microsoft.com/office/powerpoint/2010/main" Requires="p14">
+      <p:transition spd="med" p14:dur="700">
+        <p:fade/>
+      </p:transition>
+    </mc:Choice>
+    <mc:Fallback>
+      <p:transition spd="med">
+        <p:fade/>
+      </p:transition>
+    </mc:Fallback>
+  </mc:AlternateContent>
 </p:sld>
 </file>
 
@@ -5907,6 +6003,18 @@
   <p:clrMapOvr>
     <a:masterClrMapping/>
   </p:clrMapOvr>
+  <mc:AlternateContent xmlns:mc="http://schemas.openxmlformats.org/markup-compatibility/2006">
+    <mc:Choice xmlns:p14="http://schemas.microsoft.com/office/powerpoint/2010/main" Requires="p14">
+      <p:transition spd="med" p14:dur="700">
+        <p:fade/>
+      </p:transition>
+    </mc:Choice>
+    <mc:Fallback>
+      <p:transition spd="med">
+        <p:fade/>
+      </p:transition>
+    </mc:Fallback>
+  </mc:AlternateContent>
 </p:sld>
 </file>
 
@@ -6672,6 +6780,18 @@
   <p:clrMapOvr>
     <a:masterClrMapping/>
   </p:clrMapOvr>
+  <mc:AlternateContent xmlns:mc="http://schemas.openxmlformats.org/markup-compatibility/2006">
+    <mc:Choice xmlns:p14="http://schemas.microsoft.com/office/powerpoint/2010/main" Requires="p14">
+      <p:transition spd="med" p14:dur="700">
+        <p:fade/>
+      </p:transition>
+    </mc:Choice>
+    <mc:Fallback>
+      <p:transition spd="med">
+        <p:fade/>
+      </p:transition>
+    </mc:Fallback>
+  </mc:AlternateContent>
 </p:sld>
 </file>
 
@@ -6970,9 +7090,6 @@
           <a:bodyPr wrap="square" lIns="0" tIns="0" rIns="0" bIns="0" rtlCol="0" anchor="t"/>
           <a:lstStyle/>
           <a:p>
-            <a:pPr marL="0" indent="0">
-              <a:buNone/>
-            </a:pPr>
             <a:r>
               <a:rPr lang="en-US" sz="1100" i="1" dirty="0">
                 <a:solidFill>
@@ -6982,7 +7099,7 @@
                 <a:ea typeface="Calibri" pitchFamily="34" charset="-122"/>
                 <a:cs typeface="Calibri" pitchFamily="34" charset="-120"/>
               </a:rPr>
-              <a:t>Tells you when to trust rankings and when they fail.</a:t>
+              <a:t>This tells analysts, fans, federations, or media whether FIFA rankings are reliable predictors, and whether pressure/tournament intensity makes outcomes less predictable.</a:t>
             </a:r>
             <a:endParaRPr lang="en-US" sz="1100" dirty="0"/>
           </a:p>
@@ -7402,8 +7519,13 @@
                 <a:ea typeface="Calibri" pitchFamily="34" charset="-122"/>
                 <a:cs typeface="Calibri" pitchFamily="34" charset="-120"/>
               </a:rPr>
-              <a:t>Reveals where the ranking model has blind spots.</a:t>
-            </a:r>
+              <a:t>Reveals where the ranking model has blind spots; whether teams from some confederations are underrated or overrated internationally, which is useful for scouting, tournament forecasting, and evaluating ranking fairness.</a:t>
+            </a:r>
+          </a:p>
+          <a:p>
+            <a:pPr marL="0" indent="0">
+              <a:buNone/>
+            </a:pPr>
             <a:endParaRPr lang="en-US" sz="1100" dirty="0"/>
           </a:p>
         </p:txBody>
@@ -7612,7 +7734,7 @@
                 <a:ea typeface="Calibri" pitchFamily="34" charset="-122"/>
                 <a:cs typeface="Calibri" pitchFamily="34" charset="-120"/>
               </a:rPr>
-              <a:t>Useful for big gaps but unreliable for close matchups.</a:t>
+              <a:t>Useful for big gaps but unreliable for close matchups?</a:t>
             </a:r>
             <a:endParaRPr lang="en-US" sz="1100" dirty="0"/>
           </a:p>
@@ -7701,6 +7823,18 @@
   <p:clrMapOvr>
     <a:masterClrMapping/>
   </p:clrMapOvr>
+  <mc:AlternateContent xmlns:mc="http://schemas.openxmlformats.org/markup-compatibility/2006">
+    <mc:Choice xmlns:p14="http://schemas.microsoft.com/office/powerpoint/2010/main" Requires="p14">
+      <p:transition spd="med" p14:dur="700">
+        <p:fade/>
+      </p:transition>
+    </mc:Choice>
+    <mc:Fallback>
+      <p:transition spd="med">
+        <p:fade/>
+      </p:transition>
+    </mc:Fallback>
+  </mc:AlternateContent>
 </p:sld>
 </file>
 
@@ -8094,6 +8228,18 @@
   <p:clrMapOvr>
     <a:masterClrMapping/>
   </p:clrMapOvr>
+  <mc:AlternateContent xmlns:mc="http://schemas.openxmlformats.org/markup-compatibility/2006">
+    <mc:Choice xmlns:p14="http://schemas.microsoft.com/office/powerpoint/2010/main" Requires="p14">
+      <p:transition spd="med" p14:dur="700">
+        <p:fade/>
+      </p:transition>
+    </mc:Choice>
+    <mc:Fallback>
+      <p:transition spd="med">
+        <p:fade/>
+      </p:transition>
+    </mc:Fallback>
+  </mc:AlternateContent>
 </p:sld>
 </file>
 
@@ -8580,6 +8726,18 @@
   <p:clrMapOvr>
     <a:masterClrMapping/>
   </p:clrMapOvr>
+  <mc:AlternateContent xmlns:mc="http://schemas.openxmlformats.org/markup-compatibility/2006">
+    <mc:Choice xmlns:p14="http://schemas.microsoft.com/office/powerpoint/2010/main" Requires="p14">
+      <p:transition spd="med" p14:dur="700">
+        <p:fade/>
+      </p:transition>
+    </mc:Choice>
+    <mc:Fallback>
+      <p:transition spd="med">
+        <p:fade/>
+      </p:transition>
+    </mc:Fallback>
+  </mc:AlternateContent>
 </p:sld>
 </file>
 
@@ -9543,6 +9701,18 @@
   <p:clrMapOvr>
     <a:masterClrMapping/>
   </p:clrMapOvr>
+  <mc:AlternateContent xmlns:mc="http://schemas.openxmlformats.org/markup-compatibility/2006">
+    <mc:Choice xmlns:p14="http://schemas.microsoft.com/office/powerpoint/2010/main" Requires="p14">
+      <p:transition spd="med" p14:dur="700">
+        <p:fade/>
+      </p:transition>
+    </mc:Choice>
+    <mc:Fallback>
+      <p:transition spd="med">
+        <p:fade/>
+      </p:transition>
+    </mc:Fallback>
+  </mc:AlternateContent>
 </p:sld>
 </file>
 
@@ -9895,6 +10065,18 @@
   <p:clrMapOvr>
     <a:masterClrMapping/>
   </p:clrMapOvr>
+  <mc:AlternateContent xmlns:mc="http://schemas.openxmlformats.org/markup-compatibility/2006">
+    <mc:Choice xmlns:p14="http://schemas.microsoft.com/office/powerpoint/2010/main" Requires="p14">
+      <p:transition spd="med" p14:dur="700">
+        <p:fade/>
+      </p:transition>
+    </mc:Choice>
+    <mc:Fallback>
+      <p:transition spd="med">
+        <p:fade/>
+      </p:transition>
+    </mc:Fallback>
+  </mc:AlternateContent>
 </p:sld>
 </file>
 
@@ -10348,6 +10530,18 @@
   <p:clrMapOvr>
     <a:masterClrMapping/>
   </p:clrMapOvr>
+  <mc:AlternateContent xmlns:mc="http://schemas.openxmlformats.org/markup-compatibility/2006">
+    <mc:Choice xmlns:p14="http://schemas.microsoft.com/office/powerpoint/2010/main" Requires="p14">
+      <p:transition spd="med" p14:dur="700">
+        <p:fade/>
+      </p:transition>
+    </mc:Choice>
+    <mc:Fallback>
+      <p:transition spd="med">
+        <p:fade/>
+      </p:transition>
+    </mc:Fallback>
+  </mc:AlternateContent>
 </p:sld>
 </file>
 
